--- a/classes/parte-13-seguridad-movil-iot-e-inalambrica/272-ataques-wifi-avanzados-evil-twin-y-pmkid/clase-272-presentacion.pptx
+++ b/classes/parte-13-seguridad-movil-iot-e-inalambrica/272-ataques-wifi-avanzados-evil-twin-y-pmkid/clase-272-presentacion.pptx
@@ -17,6 +17,10 @@
     <p:sldId id="265" r:id="rId16"/>
     <p:sldId id="266" r:id="rId17"/>
     <p:sldId id="267" r:id="rId18"/>
+    <p:sldId id="268" r:id="rId19"/>
+    <p:sldId id="269" r:id="rId20"/>
+    <p:sldId id="270" r:id="rId21"/>
+    <p:sldId id="271" r:id="rId22"/>
   </p:sldIdLst>
   <p:sldSz cx="9144000" cy="6858000" type="screen4x3"/>
   <p:notesSz cx="6858000" cy="9144000"/>
@@ -3198,7 +3202,7 @@
                   <a:srgbClr val="0B3D2E"/>
                 </a:solidFill>
               </a:rPr>
-              <a:t>⚠️ Errores comunes</a:t>
+              <a:t>🧪 Laboratorio guiado</a:t>
             </a:r>
           </a:p>
         </p:txBody>
@@ -3236,67 +3240,97 @@
                   <a:srgbClr val="22282E"/>
                 </a:solidFill>
               </a:rPr>
-              <a:t>•  No entra en modo monitor — Chipset sin soporte; usa un adaptador compatible y mata procesos con airmon-ng check kill</a:t>
-            </a:r>
-          </a:p>
-          <a:p>
-            <a:pPr>
-              <a:spcAft>
-                <a:spcPts val="600"/>
-              </a:spcAft>
-            </a:pPr>
-            <a:r>
-              <a:rPr sz="1500">
-                <a:solidFill>
-                  <a:srgbClr val="22282E"/>
-                </a:solidFill>
-              </a:rPr>
-              <a:t>•  Handshake no válido — Captura incompleta; asegura los 4 mensajes EAPOL o usa PMKID</a:t>
-            </a:r>
-          </a:p>
-          <a:p>
-            <a:pPr>
-              <a:spcAft>
-                <a:spcPts val="600"/>
-              </a:spcAft>
-            </a:pPr>
-            <a:r>
-              <a:rPr sz="1500">
-                <a:solidFill>
-                  <a:srgbClr val="22282E"/>
-                </a:solidFill>
-              </a:rPr>
-              <a:t>•  PMKID vacío — El AP no lo expone o usa WPA3; prueba el handshake tradicional</a:t>
-            </a:r>
-          </a:p>
-          <a:p>
-            <a:pPr>
-              <a:spcAft>
-                <a:spcPts val="600"/>
-              </a:spcAft>
-            </a:pPr>
-            <a:r>
-              <a:rPr sz="1500">
-                <a:solidFill>
-                  <a:srgbClr val="22282E"/>
-                </a:solidFill>
-              </a:rPr>
-              <a:t>•  hashcat muy lento — Diccionario/hardware; usa GPU y reglas, o un diccionario dirigido</a:t>
-            </a:r>
-          </a:p>
-          <a:p>
-            <a:pPr>
-              <a:spcAft>
-                <a:spcPts val="600"/>
-              </a:spcAft>
-            </a:pPr>
-            <a:r>
-              <a:rPr sz="1500">
-                <a:solidFill>
-                  <a:srgbClr val="22282E"/>
-                </a:solidFill>
-              </a:rPr>
-              <a:t>•  Evil Twin sin clientes — Señal débil o PMF activo; ajusta potencia en tu laboratorio aislado</a:t>
+              <a:t>•  Prepara el laboratorio: configura tu propio AP con WPA2-PSK y una contraseña de prueba que esté en tu diccionario.</a:t>
+            </a:r>
+          </a:p>
+          <a:p>
+            <a:pPr>
+              <a:spcAft>
+                <a:spcPts val="600"/>
+              </a:spcAft>
+            </a:pPr>
+            <a:r>
+              <a:rPr sz="1500">
+                <a:solidFill>
+                  <a:srgbClr val="22282E"/>
+                </a:solidFill>
+              </a:rPr>
+              <a:t>•  Modo monitor: activa airmon-ng y localiza tu AP y su canal con airodump-ng.</a:t>
+            </a:r>
+          </a:p>
+          <a:p>
+            <a:pPr>
+              <a:spcAft>
+                <a:spcPts val="600"/>
+              </a:spcAft>
+            </a:pPr>
+            <a:r>
+              <a:rPr sz="1500">
+                <a:solidFill>
+                  <a:srgbClr val="22282E"/>
+                </a:solidFill>
+              </a:rPr>
+              <a:t>•  Captura el handshake: filtra por tu BSSID y canal y reconecta manualmente tu cliente. No transmitas tramas de desautenticación, que pueden afectar equipos cercanos.</a:t>
+            </a:r>
+          </a:p>
+          <a:p>
+            <a:pPr>
+              <a:spcAft>
+                <a:spcPts val="600"/>
+              </a:spcAft>
+            </a:pPr>
+            <a:r>
+              <a:rPr sz="1500">
+                <a:solidFill>
+                  <a:srgbClr val="22282E"/>
+                </a:solidFill>
+              </a:rPr>
+              <a:t>•  Captura el PMKID: con hcxdumptool obtén el PMKID de tu AP sin clientes y conviértelo a .hc22000.</a:t>
+            </a:r>
+          </a:p>
+          <a:p>
+            <a:pPr>
+              <a:spcAft>
+                <a:spcPts val="600"/>
+              </a:spcAft>
+            </a:pPr>
+            <a:r>
+              <a:rPr sz="1500">
+                <a:solidFill>
+                  <a:srgbClr val="22282E"/>
+                </a:solidFill>
+              </a:rPr>
+              <a:t>•  Crackea offline: usa hashcat modo 22000 con un diccionario; recupera la contraseña de prueba.</a:t>
+            </a:r>
+          </a:p>
+          <a:p>
+            <a:pPr>
+              <a:spcAft>
+                <a:spcPts val="600"/>
+              </a:spcAft>
+            </a:pPr>
+            <a:r>
+              <a:rPr sz="1500">
+                <a:solidFill>
+                  <a:srgbClr val="22282E"/>
+                </a:solidFill>
+              </a:rPr>
+              <a:t>•  Evil Twin: con hostapd/wifiphisher levanta un AP con el mismo SSID y un portal cautivo en laboratorio aislado; observa el flujo de captura de credenciales con un cliente de pruebas propio.</a:t>
+            </a:r>
+          </a:p>
+          <a:p>
+            <a:pPr>
+              <a:spcAft>
+                <a:spcPts val="600"/>
+              </a:spcAft>
+            </a:pPr>
+            <a:r>
+              <a:rPr sz="1500">
+                <a:solidFill>
+                  <a:srgbClr val="22282E"/>
+                </a:solidFill>
+              </a:rPr>
+              <a:t>•  Compara con WPA3: reconfigura el AP a WPA3-SAE e intenta el mismo ataque; constata que el crackeo offline ya no aplica.</a:t>
             </a:r>
           </a:p>
         </p:txBody>
@@ -3347,7 +3381,7 @@
                   <a:srgbClr val="0B3D2E"/>
                 </a:solidFill>
               </a:rPr>
-              <a:t>❓ Preguntas frecuentes</a:t>
+              <a:t>✍️ Ejercicios</a:t>
             </a:r>
           </a:p>
         </p:txBody>
@@ -3385,82 +3419,82 @@
                   <a:srgbClr val="22282E"/>
                 </a:solidFill>
               </a:rPr>
-              <a:t>•  ❓ ¿El ataque PMKID necesita clientes conectados?</a:t>
-            </a:r>
-          </a:p>
-          <a:p>
-            <a:pPr>
-              <a:spcAft>
-                <a:spcPts val="600"/>
-              </a:spcAft>
-            </a:pPr>
-            <a:r>
-              <a:rPr sz="1500">
-                <a:solidFill>
-                  <a:srgbClr val="22282E"/>
-                </a:solidFill>
-              </a:rPr>
-              <a:t>•  No: esa es su ventaja. Se obtiene directamente del AP si este incluye el PMKID, permitiendo crackeo offline sin esperar a un handshake.</a:t>
-            </a:r>
-          </a:p>
-          <a:p>
-            <a:pPr>
-              <a:spcAft>
-                <a:spcPts val="600"/>
-              </a:spcAft>
-            </a:pPr>
-            <a:r>
-              <a:rPr sz="1500">
-                <a:solidFill>
-                  <a:srgbClr val="22282E"/>
-                </a:solidFill>
-              </a:rPr>
-              <a:t>•  ❓ ¿WPA3 es inmune a todo esto?</a:t>
-            </a:r>
-          </a:p>
-          <a:p>
-            <a:pPr>
-              <a:spcAft>
-                <a:spcPts val="600"/>
-              </a:spcAft>
-            </a:pPr>
-            <a:r>
-              <a:rPr sz="1500">
-                <a:solidFill>
-                  <a:srgbClr val="22282E"/>
-                </a:solidFill>
-              </a:rPr>
-              <a:t>•  Elimina el crackeo offline del handshake gracias a SAE, pero no a contraseñas triviales ni a todos los fallos de implementación (p. ej. Dragonblood). Sigue siendo mucho más resistente que WPA2.</a:t>
-            </a:r>
-          </a:p>
-          <a:p>
-            <a:pPr>
-              <a:spcAft>
-                <a:spcPts val="600"/>
-              </a:spcAft>
-            </a:pPr>
-            <a:r>
-              <a:rPr sz="1500">
-                <a:solidFill>
-                  <a:srgbClr val="22282E"/>
-                </a:solidFill>
-              </a:rPr>
-              <a:t>•  ❓ ¿Por qué el Evil Twin funciona incluso con WPA2 fuerte?</a:t>
-            </a:r>
-          </a:p>
-          <a:p>
-            <a:pPr>
-              <a:spcAft>
-                <a:spcPts val="600"/>
-              </a:spcAft>
-            </a:pPr>
-            <a:r>
-              <a:rPr sz="1500">
-                <a:solidFill>
-                  <a:srgbClr val="22282E"/>
-                </a:solidFill>
-              </a:rPr>
-              <a:t>•  Porque ataca al usuario, no al cifrado: si la víctima se conecta al AP falso e introduce credenciales en un portal, la fortaleza del cifrado del AP legítimo es irrelevante. PMF y verificación de servidor lo mitigan.</a:t>
+              <a:t>•  Pon tu adaptador en modo monitor y lista las redes de tu entorno de laboratorio.</a:t>
+            </a:r>
+          </a:p>
+          <a:p>
+            <a:pPr>
+              <a:spcAft>
+                <a:spcPts val="600"/>
+              </a:spcAft>
+            </a:pPr>
+            <a:r>
+              <a:rPr sz="1500">
+                <a:solidFill>
+                  <a:srgbClr val="22282E"/>
+                </a:solidFill>
+              </a:rPr>
+              <a:t>•  Captura un handshake de 4 vías de tu propia red.</a:t>
+            </a:r>
+          </a:p>
+          <a:p>
+            <a:pPr>
+              <a:spcAft>
+                <a:spcPts val="600"/>
+              </a:spcAft>
+            </a:pPr>
+            <a:r>
+              <a:rPr sz="1500">
+                <a:solidFill>
+                  <a:srgbClr val="22282E"/>
+                </a:solidFill>
+              </a:rPr>
+              <a:t>•  Obtén el PMKID de tu AP y conviértelo al formato de hashcat.</a:t>
+            </a:r>
+          </a:p>
+          <a:p>
+            <a:pPr>
+              <a:spcAft>
+                <a:spcPts val="600"/>
+              </a:spcAft>
+            </a:pPr>
+            <a:r>
+              <a:rPr sz="1500">
+                <a:solidFill>
+                  <a:srgbClr val="22282E"/>
+                </a:solidFill>
+              </a:rPr>
+              <a:t>•  Crackea el hash con un diccionario y mide el tiempo.</a:t>
+            </a:r>
+          </a:p>
+          <a:p>
+            <a:pPr>
+              <a:spcAft>
+                <a:spcPts val="600"/>
+              </a:spcAft>
+            </a:pPr>
+            <a:r>
+              <a:rPr sz="1500">
+                <a:solidFill>
+                  <a:srgbClr val="22282E"/>
+                </a:solidFill>
+              </a:rPr>
+              <a:t>•  Levanta un Evil Twin con portal cautivo en laboratorio.</a:t>
+            </a:r>
+          </a:p>
+          <a:p>
+            <a:pPr>
+              <a:spcAft>
+                <a:spcPts val="600"/>
+              </a:spcAft>
+            </a:pPr>
+            <a:r>
+              <a:rPr sz="1500">
+                <a:solidFill>
+                  <a:srgbClr val="22282E"/>
+                </a:solidFill>
+              </a:rPr>
+              <a:t>•  Repite el ataque contra WPA3 y explica por qué falla.</a:t>
             </a:r>
           </a:p>
         </p:txBody>
@@ -3511,7 +3545,7 @@
                   <a:srgbClr val="0B3D2E"/>
                 </a:solidFill>
               </a:rPr>
-              <a:t>🔗 Referencias</a:t>
+              <a:t>📝 Reto verificable</a:t>
             </a:r>
           </a:p>
         </p:txBody>
@@ -3549,6 +3583,408 @@
                   <a:srgbClr val="22282E"/>
                 </a:solidFill>
               </a:rPr>
+              <a:t>•  Sobre tu propia red WPA2, captura el PMKID, conviértelo y recupera la contraseña con hashcat. Criterio de aceptación: hashcat muestra la clave crackeada correspondiente a la contraseña que…</a:t>
+            </a:r>
+          </a:p>
+        </p:txBody>
+      </p:sp>
+    </p:spTree>
+  </p:cSld>
+  <p:clrMapOvr>
+    <a:masterClrMapping/>
+  </p:clrMapOvr>
+</p:sld>
+</file>
+
+<file path=ppt/slides/slide13.xml><?xml version="1.0" encoding="utf-8"?>
+<p:sld xmlns:a="http://schemas.openxmlformats.org/drawingml/2006/main" xmlns:p="http://schemas.openxmlformats.org/presentationml/2006/main" xmlns:r="http://schemas.openxmlformats.org/officeDocument/2006/relationships">
+  <p:cSld>
+    <p:spTree>
+      <p:nvGrpSpPr>
+        <p:cNvPr id="1" name=""/>
+        <p:cNvGrpSpPr/>
+        <p:nvPr/>
+      </p:nvGrpSpPr>
+      <p:grpSpPr/>
+      <p:sp>
+        <p:nvSpPr>
+          <p:cNvPr id="2" name="TextBox 1"/>
+          <p:cNvSpPr txBox="1"/>
+          <p:nvPr/>
+        </p:nvSpPr>
+        <p:spPr>
+          <a:xfrm>
+            <a:off x="457200" y="320040"/>
+            <a:ext cx="8229600" cy="822960"/>
+          </a:xfrm>
+          <a:prstGeom prst="rect">
+            <a:avLst/>
+          </a:prstGeom>
+          <a:noFill/>
+        </p:spPr>
+        <p:txBody>
+          <a:bodyPr wrap="square">
+            <a:spAutoFit/>
+          </a:bodyPr>
+          <a:lstStyle/>
+          <a:p>
+            <a:r>
+              <a:rPr sz="2600" b="1">
+                <a:solidFill>
+                  <a:srgbClr val="0B3D2E"/>
+                </a:solidFill>
+              </a:rPr>
+              <a:t>⚠️ Errores comunes</a:t>
+            </a:r>
+          </a:p>
+        </p:txBody>
+      </p:sp>
+      <p:sp>
+        <p:nvSpPr>
+          <p:cNvPr id="3" name="TextBox 2"/>
+          <p:cNvSpPr txBox="1"/>
+          <p:nvPr/>
+        </p:nvSpPr>
+        <p:spPr>
+          <a:xfrm>
+            <a:off x="457200" y="1280160"/>
+            <a:ext cx="8229600" cy="4937760"/>
+          </a:xfrm>
+          <a:prstGeom prst="rect">
+            <a:avLst/>
+          </a:prstGeom>
+          <a:noFill/>
+        </p:spPr>
+        <p:txBody>
+          <a:bodyPr wrap="square">
+            <a:spAutoFit/>
+          </a:bodyPr>
+          <a:lstStyle/>
+          <a:p>
+            <a:pPr>
+              <a:spcAft>
+                <a:spcPts val="600"/>
+              </a:spcAft>
+            </a:pPr>
+            <a:r>
+              <a:rPr sz="1500">
+                <a:solidFill>
+                  <a:srgbClr val="22282E"/>
+                </a:solidFill>
+              </a:rPr>
+              <a:t>•  No entra en modo monitor — Chipset sin soporte; usa un adaptador compatible y mata procesos con airmon-ng check kill</a:t>
+            </a:r>
+          </a:p>
+          <a:p>
+            <a:pPr>
+              <a:spcAft>
+                <a:spcPts val="600"/>
+              </a:spcAft>
+            </a:pPr>
+            <a:r>
+              <a:rPr sz="1500">
+                <a:solidFill>
+                  <a:srgbClr val="22282E"/>
+                </a:solidFill>
+              </a:rPr>
+              <a:t>•  Handshake no válido — Captura incompleta; asegura los 4 mensajes EAPOL o usa PMKID</a:t>
+            </a:r>
+          </a:p>
+          <a:p>
+            <a:pPr>
+              <a:spcAft>
+                <a:spcPts val="600"/>
+              </a:spcAft>
+            </a:pPr>
+            <a:r>
+              <a:rPr sz="1500">
+                <a:solidFill>
+                  <a:srgbClr val="22282E"/>
+                </a:solidFill>
+              </a:rPr>
+              <a:t>•  PMKID vacío — El AP no lo expone o usa WPA3; prueba el handshake tradicional</a:t>
+            </a:r>
+          </a:p>
+          <a:p>
+            <a:pPr>
+              <a:spcAft>
+                <a:spcPts val="600"/>
+              </a:spcAft>
+            </a:pPr>
+            <a:r>
+              <a:rPr sz="1500">
+                <a:solidFill>
+                  <a:srgbClr val="22282E"/>
+                </a:solidFill>
+              </a:rPr>
+              <a:t>•  hashcat muy lento — Diccionario/hardware; usa GPU y reglas, o un diccionario dirigido</a:t>
+            </a:r>
+          </a:p>
+          <a:p>
+            <a:pPr>
+              <a:spcAft>
+                <a:spcPts val="600"/>
+              </a:spcAft>
+            </a:pPr>
+            <a:r>
+              <a:rPr sz="1500">
+                <a:solidFill>
+                  <a:srgbClr val="22282E"/>
+                </a:solidFill>
+              </a:rPr>
+              <a:t>•  Evil Twin sin clientes — Señal débil o PMF activo; ajusta potencia en tu laboratorio aislado</a:t>
+            </a:r>
+          </a:p>
+        </p:txBody>
+      </p:sp>
+    </p:spTree>
+  </p:cSld>
+  <p:clrMapOvr>
+    <a:masterClrMapping/>
+  </p:clrMapOvr>
+</p:sld>
+</file>
+
+<file path=ppt/slides/slide14.xml><?xml version="1.0" encoding="utf-8"?>
+<p:sld xmlns:a="http://schemas.openxmlformats.org/drawingml/2006/main" xmlns:p="http://schemas.openxmlformats.org/presentationml/2006/main" xmlns:r="http://schemas.openxmlformats.org/officeDocument/2006/relationships">
+  <p:cSld>
+    <p:spTree>
+      <p:nvGrpSpPr>
+        <p:cNvPr id="1" name=""/>
+        <p:cNvGrpSpPr/>
+        <p:nvPr/>
+      </p:nvGrpSpPr>
+      <p:grpSpPr/>
+      <p:sp>
+        <p:nvSpPr>
+          <p:cNvPr id="2" name="TextBox 1"/>
+          <p:cNvSpPr txBox="1"/>
+          <p:nvPr/>
+        </p:nvSpPr>
+        <p:spPr>
+          <a:xfrm>
+            <a:off x="457200" y="320040"/>
+            <a:ext cx="8229600" cy="822960"/>
+          </a:xfrm>
+          <a:prstGeom prst="rect">
+            <a:avLst/>
+          </a:prstGeom>
+          <a:noFill/>
+        </p:spPr>
+        <p:txBody>
+          <a:bodyPr wrap="square">
+            <a:spAutoFit/>
+          </a:bodyPr>
+          <a:lstStyle/>
+          <a:p>
+            <a:r>
+              <a:rPr sz="2600" b="1">
+                <a:solidFill>
+                  <a:srgbClr val="0B3D2E"/>
+                </a:solidFill>
+              </a:rPr>
+              <a:t>❓ Preguntas frecuentes</a:t>
+            </a:r>
+          </a:p>
+        </p:txBody>
+      </p:sp>
+      <p:sp>
+        <p:nvSpPr>
+          <p:cNvPr id="3" name="TextBox 2"/>
+          <p:cNvSpPr txBox="1"/>
+          <p:nvPr/>
+        </p:nvSpPr>
+        <p:spPr>
+          <a:xfrm>
+            <a:off x="457200" y="1280160"/>
+            <a:ext cx="8229600" cy="4937760"/>
+          </a:xfrm>
+          <a:prstGeom prst="rect">
+            <a:avLst/>
+          </a:prstGeom>
+          <a:noFill/>
+        </p:spPr>
+        <p:txBody>
+          <a:bodyPr wrap="square">
+            <a:spAutoFit/>
+          </a:bodyPr>
+          <a:lstStyle/>
+          <a:p>
+            <a:pPr>
+              <a:spcAft>
+                <a:spcPts val="600"/>
+              </a:spcAft>
+            </a:pPr>
+            <a:r>
+              <a:rPr sz="1500">
+                <a:solidFill>
+                  <a:srgbClr val="22282E"/>
+                </a:solidFill>
+              </a:rPr>
+              <a:t>•  ❓ ¿El ataque PMKID necesita clientes conectados?</a:t>
+            </a:r>
+          </a:p>
+          <a:p>
+            <a:pPr>
+              <a:spcAft>
+                <a:spcPts val="600"/>
+              </a:spcAft>
+            </a:pPr>
+            <a:r>
+              <a:rPr sz="1500">
+                <a:solidFill>
+                  <a:srgbClr val="22282E"/>
+                </a:solidFill>
+              </a:rPr>
+              <a:t>•  No: esa es su ventaja. Se obtiene directamente del AP si este incluye el PMKID, permitiendo crackeo offline sin esperar a un handshake.</a:t>
+            </a:r>
+          </a:p>
+          <a:p>
+            <a:pPr>
+              <a:spcAft>
+                <a:spcPts val="600"/>
+              </a:spcAft>
+            </a:pPr>
+            <a:r>
+              <a:rPr sz="1500">
+                <a:solidFill>
+                  <a:srgbClr val="22282E"/>
+                </a:solidFill>
+              </a:rPr>
+              <a:t>•  ❓ ¿WPA3 es inmune a todo esto?</a:t>
+            </a:r>
+          </a:p>
+          <a:p>
+            <a:pPr>
+              <a:spcAft>
+                <a:spcPts val="600"/>
+              </a:spcAft>
+            </a:pPr>
+            <a:r>
+              <a:rPr sz="1500">
+                <a:solidFill>
+                  <a:srgbClr val="22282E"/>
+                </a:solidFill>
+              </a:rPr>
+              <a:t>•  SAE evita la verificación offline pasiva propia de WPA2-PSK a partir de una captura equivalente, pero contraseñas débiles, modo transición, configuración e implementación siguen importando. La…</a:t>
+            </a:r>
+          </a:p>
+          <a:p>
+            <a:pPr>
+              <a:spcAft>
+                <a:spcPts val="600"/>
+              </a:spcAft>
+            </a:pPr>
+            <a:r>
+              <a:rPr sz="1500">
+                <a:solidFill>
+                  <a:srgbClr val="22282E"/>
+                </a:solidFill>
+              </a:rPr>
+              <a:t>•  ❓ ¿Por qué el Evil Twin funciona incluso con WPA2 fuerte?</a:t>
+            </a:r>
+          </a:p>
+          <a:p>
+            <a:pPr>
+              <a:spcAft>
+                <a:spcPts val="600"/>
+              </a:spcAft>
+            </a:pPr>
+            <a:r>
+              <a:rPr sz="1500">
+                <a:solidFill>
+                  <a:srgbClr val="22282E"/>
+                </a:solidFill>
+              </a:rPr>
+              <a:t>•  Porque ataca al usuario, no al cifrado: si la víctima se conecta al AP falso e introduce credenciales en un portal, la fortaleza del cifrado del AP legítimo es irrelevante. PMF y verificación de…</a:t>
+            </a:r>
+          </a:p>
+        </p:txBody>
+      </p:sp>
+    </p:spTree>
+  </p:cSld>
+  <p:clrMapOvr>
+    <a:masterClrMapping/>
+  </p:clrMapOvr>
+</p:sld>
+</file>
+
+<file path=ppt/slides/slide15.xml><?xml version="1.0" encoding="utf-8"?>
+<p:sld xmlns:a="http://schemas.openxmlformats.org/drawingml/2006/main" xmlns:p="http://schemas.openxmlformats.org/presentationml/2006/main" xmlns:r="http://schemas.openxmlformats.org/officeDocument/2006/relationships">
+  <p:cSld>
+    <p:spTree>
+      <p:nvGrpSpPr>
+        <p:cNvPr id="1" name=""/>
+        <p:cNvGrpSpPr/>
+        <p:nvPr/>
+      </p:nvGrpSpPr>
+      <p:grpSpPr/>
+      <p:sp>
+        <p:nvSpPr>
+          <p:cNvPr id="2" name="TextBox 1"/>
+          <p:cNvSpPr txBox="1"/>
+          <p:nvPr/>
+        </p:nvSpPr>
+        <p:spPr>
+          <a:xfrm>
+            <a:off x="457200" y="320040"/>
+            <a:ext cx="8229600" cy="822960"/>
+          </a:xfrm>
+          <a:prstGeom prst="rect">
+            <a:avLst/>
+          </a:prstGeom>
+          <a:noFill/>
+        </p:spPr>
+        <p:txBody>
+          <a:bodyPr wrap="square">
+            <a:spAutoFit/>
+          </a:bodyPr>
+          <a:lstStyle/>
+          <a:p>
+            <a:r>
+              <a:rPr sz="2600" b="1">
+                <a:solidFill>
+                  <a:srgbClr val="0B3D2E"/>
+                </a:solidFill>
+              </a:rPr>
+              <a:t>🔗 Referencias</a:t>
+            </a:r>
+          </a:p>
+        </p:txBody>
+      </p:sp>
+      <p:sp>
+        <p:nvSpPr>
+          <p:cNvPr id="3" name="TextBox 2"/>
+          <p:cNvSpPr txBox="1"/>
+          <p:nvPr/>
+        </p:nvSpPr>
+        <p:spPr>
+          <a:xfrm>
+            <a:off x="457200" y="1280160"/>
+            <a:ext cx="8229600" cy="4937760"/>
+          </a:xfrm>
+          <a:prstGeom prst="rect">
+            <a:avLst/>
+          </a:prstGeom>
+          <a:noFill/>
+        </p:spPr>
+        <p:txBody>
+          <a:bodyPr wrap="square">
+            <a:spAutoFit/>
+          </a:bodyPr>
+          <a:lstStyle/>
+          <a:p>
+            <a:pPr>
+              <a:spcAft>
+                <a:spcPts val="600"/>
+              </a:spcAft>
+            </a:pPr>
+            <a:r>
+              <a:rPr sz="1500">
+                <a:solidFill>
+                  <a:srgbClr val="22282E"/>
+                </a:solidFill>
+              </a:rPr>
               <a:t>•  Aircrack-ng: &lt;https://www.aircrack-ng.org/&gt;</a:t>
             </a:r>
           </a:p>
@@ -3599,6 +4035,81 @@
           </a:p>
         </p:txBody>
       </p:sp>
+    </p:spTree>
+  </p:cSld>
+  <p:clrMapOvr>
+    <a:masterClrMapping/>
+  </p:clrMapOvr>
+</p:sld>
+</file>
+
+<file path=ppt/slides/slide16.xml><?xml version="1.0" encoding="utf-8"?>
+<p:sld xmlns:a="http://schemas.openxmlformats.org/drawingml/2006/main" xmlns:p="http://schemas.openxmlformats.org/presentationml/2006/main" xmlns:r="http://schemas.openxmlformats.org/officeDocument/2006/relationships">
+  <p:cSld>
+    <p:spTree>
+      <p:nvGrpSpPr>
+        <p:cNvPr id="1" name=""/>
+        <p:cNvGrpSpPr/>
+        <p:nvPr/>
+      </p:nvGrpSpPr>
+      <p:grpSpPr/>
+      <p:sp>
+        <p:nvSpPr>
+          <p:cNvPr id="2" name="TextBox 1"/>
+          <p:cNvSpPr txBox="1"/>
+          <p:nvPr/>
+        </p:nvSpPr>
+        <p:spPr>
+          <a:xfrm>
+            <a:off x="457200" y="274320"/>
+            <a:ext cx="8229600" cy="640080"/>
+          </a:xfrm>
+          <a:prstGeom prst="rect">
+            <a:avLst/>
+          </a:prstGeom>
+          <a:noFill/>
+        </p:spPr>
+        <p:txBody>
+          <a:bodyPr wrap="square">
+            <a:spAutoFit/>
+          </a:bodyPr>
+          <a:lstStyle/>
+          <a:p>
+            <a:r>
+              <a:rPr sz="2200" b="1">
+                <a:solidFill>
+                  <a:srgbClr val="0B3D2E"/>
+                </a:solidFill>
+              </a:rPr>
+              <a:t>Diagrama de la clase</a:t>
+            </a:r>
+          </a:p>
+        </p:txBody>
+      </p:sp>
+      <p:pic>
+        <p:nvPicPr>
+          <p:cNvPr id="3" name="Picture 2" descr="b51c86e451273b67.png"/>
+          <p:cNvPicPr>
+            <a:picLocks noChangeAspect="1"/>
+          </p:cNvPicPr>
+          <p:nvPr/>
+        </p:nvPicPr>
+        <p:blipFill>
+          <a:blip r:embed="rId2"/>
+          <a:stretch>
+            <a:fillRect/>
+          </a:stretch>
+        </p:blipFill>
+        <p:spPr>
+          <a:xfrm>
+            <a:off x="457200" y="2093976"/>
+            <a:ext cx="8229600" cy="3310128"/>
+          </a:xfrm>
+          <a:prstGeom prst="rect">
+            <a:avLst/>
+          </a:prstGeom>
+        </p:spPr>
+      </p:pic>
     </p:spTree>
   </p:cSld>
   <p:clrMapOvr>
@@ -3683,7 +4194,7 @@
                   <a:srgbClr val="22282E"/>
                 </a:solidFill>
               </a:rPr>
-              <a:t>•  Ejecutar ataques modernos contra redes WiFi WPA2/WPA3-PSK en un entorno propio y controlado: captura del handshake de 4 vías y del PMKID (sin necesidad de clientes conectados), crackeo offline con hashcat, y montaje de un Evil Twin con portal cautivo para capturar credenciales. El alumno entenderá por qué el PMKID cambió el juego, cómo WPA3-SAE resiste estos ataques, y qué defensas aplicar.</a:t>
+              <a:t>•  Ejecutar ataques modernos contra redes WiFi WPA2/WPA3-PSK en un entorno propio y controlado: captura del handshake de 4 vías y del PMKID (sin necesidad de clientes conectados), crackeo offline con…</a:t>
             </a:r>
           </a:p>
         </p:txBody>
@@ -4092,7 +4603,7 @@
                   <a:srgbClr val="0B3D2E"/>
                 </a:solidFill>
               </a:rPr>
-              <a:t>📖 Definiciones y características</a:t>
+              <a:t>🧠 Explicación en profundidad</a:t>
             </a:r>
           </a:p>
         </p:txBody>
@@ -4130,82 +4641,52 @@
                   <a:srgbClr val="22282E"/>
                 </a:solidFill>
               </a:rPr>
-              <a:t>•  Modo monitor: estado del adaptador que captura todos los frames 802.11 del canal. Característica: prerequisito para sniffing e inyección.</a:t>
-            </a:r>
-          </a:p>
-          <a:p>
-            <a:pPr>
-              <a:spcAft>
-                <a:spcPts val="600"/>
-              </a:spcAft>
-            </a:pPr>
-            <a:r>
-              <a:rPr sz="1500">
-                <a:solidFill>
-                  <a:srgbClr val="22282E"/>
-                </a:solidFill>
-              </a:rPr>
-              <a:t>•  Handshake de 4 vías: intercambio WPA2 que deriva las claves de sesión a partir del PSK. Característica: capturable durante la asociación de un cliente.</a:t>
-            </a:r>
-          </a:p>
-          <a:p>
-            <a:pPr>
-              <a:spcAft>
-                <a:spcPts val="600"/>
-              </a:spcAft>
-            </a:pPr>
-            <a:r>
-              <a:rPr sz="1500">
-                <a:solidFill>
-                  <a:srgbClr val="22282E"/>
-                </a:solidFill>
-              </a:rPr>
-              <a:t>•  PMKID: identificador incluido opcionalmente por el AP en el primer mensaje EAPOL, derivado del PMK. Característica: permite crackeo offline sin clientes.</a:t>
-            </a:r>
-          </a:p>
-          <a:p>
-            <a:pPr>
-              <a:spcAft>
-                <a:spcPts val="600"/>
-              </a:spcAft>
-            </a:pPr>
-            <a:r>
-              <a:rPr sz="1500">
-                <a:solidFill>
-                  <a:srgbClr val="22282E"/>
-                </a:solidFill>
-              </a:rPr>
-              <a:t>•  hcxdumptool/hcxtools: utilidades para capturar PMKID/handshakes y convertirlos al formato de hashcat. Característica: automatizan la captura clientless.</a:t>
-            </a:r>
-          </a:p>
-          <a:p>
-            <a:pPr>
-              <a:spcAft>
-                <a:spcPts val="600"/>
-              </a:spcAft>
-            </a:pPr>
-            <a:r>
-              <a:rPr sz="1500">
-                <a:solidFill>
-                  <a:srgbClr val="22282E"/>
-                </a:solidFill>
-              </a:rPr>
-              <a:t>•  Evil Twin: AP falso que imita el SSID legítimo para atraer clientes. Característica: combinado con portal cautivo, captura credenciales.</a:t>
-            </a:r>
-          </a:p>
-          <a:p>
-            <a:pPr>
-              <a:spcAft>
-                <a:spcPts val="600"/>
-              </a:spcAft>
-            </a:pPr>
-            <a:r>
-              <a:rPr sz="1500">
-                <a:solidFill>
-                  <a:srgbClr val="22282E"/>
-                </a:solidFill>
-              </a:rPr>
-              <a:t>•  WPA3-SAE (Dragonfly): handshake con autenticación simultánea de iguales resistente a diccionario offline. Característica: elimina el crackeo del handshake capturado.</a:t>
+              <a:t>•  En WPA2-Personal, la clave de red deriva de la contraseña y SSID; el handshake demuestra posesión sin transmitirla directamente. Una captura suficiente permite comprobar candidatos offline, por lo…</a:t>
+            </a:r>
+          </a:p>
+          <a:p>
+            <a:pPr>
+              <a:spcAft>
+                <a:spcPts val="600"/>
+              </a:spcAft>
+            </a:pPr>
+            <a:r>
+              <a:rPr sz="1500">
+                <a:solidFill>
+                  <a:srgbClr val="22282E"/>
+                </a:solidFill>
+              </a:rPr>
+              <a:t>•  Un Evil Twin explota selección de red y confianza del usuario. En empresa, validar el certificado del servidor EAP y desplegar perfiles gestionados evita aceptar un autenticador impostor. En redes…</a:t>
+            </a:r>
+          </a:p>
+          <a:p>
+            <a:pPr>
+              <a:spcAft>
+                <a:spcPts val="600"/>
+              </a:spcAft>
+            </a:pPr>
+            <a:r>
+              <a:rPr sz="1500">
+                <a:solidFill>
+                  <a:srgbClr val="22282E"/>
+                </a:solidFill>
+              </a:rPr>
+              <a:t>•  El laboratorio usa AP, cliente y canal propios dentro de un entorno controlado. No se desautentican equipos ajenos: la reconexión se provoca manualmente o con el propio cliente. Las listas de prueba…</a:t>
+            </a:r>
+          </a:p>
+          <a:p>
+            <a:pPr>
+              <a:spcAft>
+                <a:spcPts val="600"/>
+              </a:spcAft>
+            </a:pPr>
+            <a:r>
+              <a:rPr sz="1500">
+                <a:solidFill>
+                  <a:srgbClr val="22282E"/>
+                </a:solidFill>
+              </a:rPr>
+              <a:t>•  Un AP anuncia WPA2/WPA3 para compatibilidad. Un cliente antiguo usa WPA2 y conserva riesgo de PSK débil; otro usa SAE. El informe no declara «WPA3 roto», sino que identifica negociación por cliente y…</a:t>
             </a:r>
           </a:p>
         </p:txBody>
@@ -4256,7 +4737,7 @@
                   <a:srgbClr val="0B3D2E"/>
                 </a:solidFill>
               </a:rPr>
-              <a:t>🧰 Herramientas y preparación</a:t>
+              <a:t>📔 Glosario operativo</a:t>
             </a:r>
           </a:p>
         </p:txBody>
@@ -4294,97 +4775,82 @@
                   <a:srgbClr val="22282E"/>
                 </a:solidFill>
               </a:rPr>
-              <a:t>•  Adaptador WiFi con soporte de modo monitor e inyección (chipsets Atheros/Ralink/MediaTek), AP propio de laboratorio.</a:t>
-            </a:r>
-          </a:p>
-          <a:p>
-            <a:pPr>
-              <a:spcAft>
-                <a:spcPts val="600"/>
-              </a:spcAft>
-            </a:pPr>
-            <a:r>
-              <a:rPr sz="1500">
-                <a:solidFill>
-                  <a:srgbClr val="22282E"/>
-                </a:solidFill>
-              </a:rPr>
-              <a:t>•  Aircrack-ng, hcxdumptool/hcxtools, hashcat, hostapd/hostapd-mana o wifiphisher para Evil Twin.</a:t>
-            </a:r>
-          </a:p>
-          <a:p>
-            <a:pPr>
-              <a:spcAft>
-                <a:spcPts val="600"/>
-              </a:spcAft>
-            </a:pPr>
-            <a:r>
-              <a:rPr sz="1500">
-                <a:solidFill>
-                  <a:srgbClr val="22282E"/>
-                </a:solidFill>
-              </a:rPr>
-              <a:t>•  sudo airmon-ng start wlan0</a:t>
-            </a:r>
-          </a:p>
-          <a:p>
-            <a:pPr>
-              <a:spcAft>
-                <a:spcPts val="600"/>
-              </a:spcAft>
-            </a:pPr>
-            <a:r>
-              <a:rPr sz="1500">
-                <a:solidFill>
-                  <a:srgbClr val="22282E"/>
-                </a:solidFill>
-              </a:rPr>
-              <a:t>•  sudo airodump-ng wlan0mon                 # descubrir tu AP y su canal</a:t>
-            </a:r>
-          </a:p>
-          <a:p>
-            <a:pPr>
-              <a:spcAft>
-                <a:spcPts val="600"/>
-              </a:spcAft>
-            </a:pPr>
-            <a:r>
-              <a:rPr sz="1500">
-                <a:solidFill>
-                  <a:srgbClr val="22282E"/>
-                </a:solidFill>
-              </a:rPr>
-              <a:t>•  sudo airodump-ng -c 6 --bssid AA:BB:CC:DD:EE:FF -w cap wlan0mon</a:t>
-            </a:r>
-          </a:p>
-          <a:p>
-            <a:pPr>
-              <a:spcAft>
-                <a:spcPts val="600"/>
-              </a:spcAft>
-            </a:pPr>
-            <a:r>
-              <a:rPr sz="1500">
-                <a:solidFill>
-                  <a:srgbClr val="22282E"/>
-                </a:solidFill>
-              </a:rPr>
-              <a:t>•  sudo aireplay-ng --deauth 3 -a AA:BB:CC:DD:EE:FF wlan0mon</a:t>
-            </a:r>
-          </a:p>
-          <a:p>
-            <a:pPr>
-              <a:spcAft>
-                <a:spcPts val="600"/>
-              </a:spcAft>
-            </a:pPr>
-            <a:r>
-              <a:rPr sz="1500">
-                <a:solidFill>
-                  <a:srgbClr val="22282E"/>
-                </a:solidFill>
-              </a:rPr>
-              <a:t>•  sudo hcxdumptool -i wlan0mon -o pmkid.pcapng --enablestatus=1</a:t>
+              <a:t>•  Término — Definición útil</a:t>
+            </a:r>
+          </a:p>
+          <a:p>
+            <a:pPr>
+              <a:spcAft>
+                <a:spcPts val="600"/>
+              </a:spcAft>
+            </a:pPr>
+            <a:r>
+              <a:rPr sz="1500">
+                <a:solidFill>
+                  <a:srgbClr val="22282E"/>
+                </a:solidFill>
+              </a:rPr>
+              <a:t>•  4-way handshake — Intercambio que confirma claves y deriva claves de sesión.</a:t>
+            </a:r>
+          </a:p>
+          <a:p>
+            <a:pPr>
+              <a:spcAft>
+                <a:spcPts val="600"/>
+              </a:spcAft>
+            </a:pPr>
+            <a:r>
+              <a:rPr sz="1500">
+                <a:solidFill>
+                  <a:srgbClr val="22282E"/>
+                </a:solidFill>
+              </a:rPr>
+              <a:t>•  PMKID — Identificador derivado que algunas configuraciones exponen para gestión de claves.</a:t>
+            </a:r>
+          </a:p>
+          <a:p>
+            <a:pPr>
+              <a:spcAft>
+                <a:spcPts val="600"/>
+              </a:spcAft>
+            </a:pPr>
+            <a:r>
+              <a:rPr sz="1500">
+                <a:solidFill>
+                  <a:srgbClr val="22282E"/>
+                </a:solidFill>
+              </a:rPr>
+              <a:t>•  SAE — Autenticación basada en contraseña usada por WPA3-Personal.</a:t>
+            </a:r>
+          </a:p>
+          <a:p>
+            <a:pPr>
+              <a:spcAft>
+                <a:spcPts val="600"/>
+              </a:spcAft>
+            </a:pPr>
+            <a:r>
+              <a:rPr sz="1500">
+                <a:solidFill>
+                  <a:srgbClr val="22282E"/>
+                </a:solidFill>
+              </a:rPr>
+              <a:t>•  PMF — Protección de ciertas tramas de gestión IEEE 802.11.</a:t>
+            </a:r>
+          </a:p>
+          <a:p>
+            <a:pPr>
+              <a:spcAft>
+                <a:spcPts val="600"/>
+              </a:spcAft>
+            </a:pPr>
+            <a:r>
+              <a:rPr sz="1500">
+                <a:solidFill>
+                  <a:srgbClr val="22282E"/>
+                </a:solidFill>
+              </a:rPr>
+              <a:t>•  Evil Twin — AP impostor que imita identidad de una red.</a:t>
             </a:r>
           </a:p>
         </p:txBody>
@@ -4435,7 +4901,7 @@
                   <a:srgbClr val="0B3D2E"/>
                 </a:solidFill>
               </a:rPr>
-              <a:t>🧪 Laboratorio guiado</a:t>
+              <a:t>✅ Criterio de dominio</a:t>
             </a:r>
           </a:p>
         </p:txBody>
@@ -4473,97 +4939,7 @@
                   <a:srgbClr val="22282E"/>
                 </a:solidFill>
               </a:rPr>
-              <a:t>•  Prepara el laboratorio: configura tu propio AP con WPA2-PSK y una contraseña de prueba que esté en tu diccionario.</a:t>
-            </a:r>
-          </a:p>
-          <a:p>
-            <a:pPr>
-              <a:spcAft>
-                <a:spcPts val="600"/>
-              </a:spcAft>
-            </a:pPr>
-            <a:r>
-              <a:rPr sz="1500">
-                <a:solidFill>
-                  <a:srgbClr val="22282E"/>
-                </a:solidFill>
-              </a:rPr>
-              <a:t>•  Modo monitor: activa airmon-ng y localiza tu AP y su canal con airodump-ng.</a:t>
-            </a:r>
-          </a:p>
-          <a:p>
-            <a:pPr>
-              <a:spcAft>
-                <a:spcPts val="600"/>
-              </a:spcAft>
-            </a:pPr>
-            <a:r>
-              <a:rPr sz="1500">
-                <a:solidFill>
-                  <a:srgbClr val="22282E"/>
-                </a:solidFill>
-              </a:rPr>
-              <a:t>•  Captura el handshake: filtra por tu BSSID/canal y provoca la reconexión de tu cliente con una deauth breve.</a:t>
-            </a:r>
-          </a:p>
-          <a:p>
-            <a:pPr>
-              <a:spcAft>
-                <a:spcPts val="600"/>
-              </a:spcAft>
-            </a:pPr>
-            <a:r>
-              <a:rPr sz="1500">
-                <a:solidFill>
-                  <a:srgbClr val="22282E"/>
-                </a:solidFill>
-              </a:rPr>
-              <a:t>•  Captura el PMKID: con hcxdumptool obtén el PMKID de tu AP sin clientes y conviértelo a .hc22000.</a:t>
-            </a:r>
-          </a:p>
-          <a:p>
-            <a:pPr>
-              <a:spcAft>
-                <a:spcPts val="600"/>
-              </a:spcAft>
-            </a:pPr>
-            <a:r>
-              <a:rPr sz="1500">
-                <a:solidFill>
-                  <a:srgbClr val="22282E"/>
-                </a:solidFill>
-              </a:rPr>
-              <a:t>•  Crackea offline: usa hashcat modo 22000 con un diccionario; recupera la contraseña de prueba.</a:t>
-            </a:r>
-          </a:p>
-          <a:p>
-            <a:pPr>
-              <a:spcAft>
-                <a:spcPts val="600"/>
-              </a:spcAft>
-            </a:pPr>
-            <a:r>
-              <a:rPr sz="1500">
-                <a:solidFill>
-                  <a:srgbClr val="22282E"/>
-                </a:solidFill>
-              </a:rPr>
-              <a:t>•  Evil Twin: con hostapd/wifiphisher levanta un AP con el mismo SSID y un portal cautivo en laboratorio aislado; observa el flujo de captura de credenciales con un cliente de pruebas propio.</a:t>
-            </a:r>
-          </a:p>
-          <a:p>
-            <a:pPr>
-              <a:spcAft>
-                <a:spcPts val="600"/>
-              </a:spcAft>
-            </a:pPr>
-            <a:r>
-              <a:rPr sz="1500">
-                <a:solidFill>
-                  <a:srgbClr val="22282E"/>
-                </a:solidFill>
-              </a:rPr>
-              <a:t>•  Compara con WPA3: reconfigura el AP a WPA3-SAE e intenta el mismo ataque; constata que el crackeo offline ya no aplica.</a:t>
+              <a:t>•  Existe dominio cuando el alumno explica qué prueba una captura, diferencia WPA2, SAE y PMF, ejecuta la demostración sin afectar terceros y recomienda controles según tipo de red y clientes.</a:t>
             </a:r>
           </a:p>
         </p:txBody>
@@ -4614,7 +4990,7 @@
                   <a:srgbClr val="0B3D2E"/>
                 </a:solidFill>
               </a:rPr>
-              <a:t>✍️ Ejercicios</a:t>
+              <a:t>📖 Definiciones y características</a:t>
             </a:r>
           </a:p>
         </p:txBody>
@@ -4652,82 +5028,82 @@
                   <a:srgbClr val="22282E"/>
                 </a:solidFill>
               </a:rPr>
-              <a:t>•  Pon tu adaptador en modo monitor y lista las redes de tu entorno de laboratorio.</a:t>
-            </a:r>
-          </a:p>
-          <a:p>
-            <a:pPr>
-              <a:spcAft>
-                <a:spcPts val="600"/>
-              </a:spcAft>
-            </a:pPr>
-            <a:r>
-              <a:rPr sz="1500">
-                <a:solidFill>
-                  <a:srgbClr val="22282E"/>
-                </a:solidFill>
-              </a:rPr>
-              <a:t>•  Captura un handshake de 4 vías de tu propia red.</a:t>
-            </a:r>
-          </a:p>
-          <a:p>
-            <a:pPr>
-              <a:spcAft>
-                <a:spcPts val="600"/>
-              </a:spcAft>
-            </a:pPr>
-            <a:r>
-              <a:rPr sz="1500">
-                <a:solidFill>
-                  <a:srgbClr val="22282E"/>
-                </a:solidFill>
-              </a:rPr>
-              <a:t>•  Obtén el PMKID de tu AP y conviértelo al formato de hashcat.</a:t>
-            </a:r>
-          </a:p>
-          <a:p>
-            <a:pPr>
-              <a:spcAft>
-                <a:spcPts val="600"/>
-              </a:spcAft>
-            </a:pPr>
-            <a:r>
-              <a:rPr sz="1500">
-                <a:solidFill>
-                  <a:srgbClr val="22282E"/>
-                </a:solidFill>
-              </a:rPr>
-              <a:t>•  Crackea el hash con un diccionario y mide el tiempo.</a:t>
-            </a:r>
-          </a:p>
-          <a:p>
-            <a:pPr>
-              <a:spcAft>
-                <a:spcPts val="600"/>
-              </a:spcAft>
-            </a:pPr>
-            <a:r>
-              <a:rPr sz="1500">
-                <a:solidFill>
-                  <a:srgbClr val="22282E"/>
-                </a:solidFill>
-              </a:rPr>
-              <a:t>•  Levanta un Evil Twin con portal cautivo en laboratorio.</a:t>
-            </a:r>
-          </a:p>
-          <a:p>
-            <a:pPr>
-              <a:spcAft>
-                <a:spcPts val="600"/>
-              </a:spcAft>
-            </a:pPr>
-            <a:r>
-              <a:rPr sz="1500">
-                <a:solidFill>
-                  <a:srgbClr val="22282E"/>
-                </a:solidFill>
-              </a:rPr>
-              <a:t>•  Repite el ataque contra WPA3 y explica por qué falla.</a:t>
+              <a:t>•  Modo monitor: estado del adaptador que captura todos los frames 802.11 del canal. Característica: prerequisito para sniffing e inyección.</a:t>
+            </a:r>
+          </a:p>
+          <a:p>
+            <a:pPr>
+              <a:spcAft>
+                <a:spcPts val="600"/>
+              </a:spcAft>
+            </a:pPr>
+            <a:r>
+              <a:rPr sz="1500">
+                <a:solidFill>
+                  <a:srgbClr val="22282E"/>
+                </a:solidFill>
+              </a:rPr>
+              <a:t>•  Handshake de 4 vías: intercambio WPA2 que deriva las claves de sesión a partir del PSK. Característica: capturable durante la asociación de un cliente.</a:t>
+            </a:r>
+          </a:p>
+          <a:p>
+            <a:pPr>
+              <a:spcAft>
+                <a:spcPts val="600"/>
+              </a:spcAft>
+            </a:pPr>
+            <a:r>
+              <a:rPr sz="1500">
+                <a:solidFill>
+                  <a:srgbClr val="22282E"/>
+                </a:solidFill>
+              </a:rPr>
+              <a:t>•  PMKID: identificador incluido opcionalmente por el AP en el primer mensaje EAPOL, derivado del PMK. Característica: permite crackeo offline sin clientes.</a:t>
+            </a:r>
+          </a:p>
+          <a:p>
+            <a:pPr>
+              <a:spcAft>
+                <a:spcPts val="600"/>
+              </a:spcAft>
+            </a:pPr>
+            <a:r>
+              <a:rPr sz="1500">
+                <a:solidFill>
+                  <a:srgbClr val="22282E"/>
+                </a:solidFill>
+              </a:rPr>
+              <a:t>•  hcxdumptool/hcxtools: utilidades para capturar PMKID/handshakes y convertirlos al formato de hashcat. Característica: automatizan la captura clientless.</a:t>
+            </a:r>
+          </a:p>
+          <a:p>
+            <a:pPr>
+              <a:spcAft>
+                <a:spcPts val="600"/>
+              </a:spcAft>
+            </a:pPr>
+            <a:r>
+              <a:rPr sz="1500">
+                <a:solidFill>
+                  <a:srgbClr val="22282E"/>
+                </a:solidFill>
+              </a:rPr>
+              <a:t>•  Evil Twin: AP falso que imita el SSID legítimo para atraer clientes. Característica: combinado con portal cautivo, captura credenciales.</a:t>
+            </a:r>
+          </a:p>
+          <a:p>
+            <a:pPr>
+              <a:spcAft>
+                <a:spcPts val="600"/>
+              </a:spcAft>
+            </a:pPr>
+            <a:r>
+              <a:rPr sz="1500">
+                <a:solidFill>
+                  <a:srgbClr val="22282E"/>
+                </a:solidFill>
+              </a:rPr>
+              <a:t>•  WPA3-SAE (Dragonfly): handshake con autenticación simultánea de iguales resistente a diccionario offline. Característica: elimina el crackeo del handshake capturado.</a:t>
             </a:r>
           </a:p>
         </p:txBody>
@@ -4778,7 +5154,7 @@
                   <a:srgbClr val="0B3D2E"/>
                 </a:solidFill>
               </a:rPr>
-              <a:t>📝 Reto verificable</a:t>
+              <a:t>🧰 Herramientas y preparación</a:t>
             </a:r>
           </a:p>
         </p:txBody>
@@ -4816,7 +5192,22 @@
                   <a:srgbClr val="22282E"/>
                 </a:solidFill>
               </a:rPr>
-              <a:t>•  Sobre tu propia red WPA2, captura el PMKID, conviértelo y recupera la contraseña con hashcat. Criterio de aceptación: hashcat muestra la clave crackeada correspondiente a la contraseña que configuraste, y explicas la diferencia con el intento equivalente sobre WPA3-SAE, que no debe ser crackeable offline.</a:t>
+              <a:t>•  Adaptador WiFi con soporte de modo monitor e inyección (chipsets Atheros/Ralink/MediaTek), AP propio de laboratorio.</a:t>
+            </a:r>
+          </a:p>
+          <a:p>
+            <a:pPr>
+              <a:spcAft>
+                <a:spcPts val="600"/>
+              </a:spcAft>
+            </a:pPr>
+            <a:r>
+              <a:rPr sz="1500">
+                <a:solidFill>
+                  <a:srgbClr val="22282E"/>
+                </a:solidFill>
+              </a:rPr>
+              <a:t>•  Aircrack-ng, hcxdumptool/hcxtools, hashcat, hostapd/hostapd-mana o wifiphisher para Evil Twin.</a:t>
             </a:r>
           </a:p>
         </p:txBody>
